--- a/src/phase2.1.pptx
+++ b/src/phase2.1.pptx
@@ -5,7 +5,7 @@
     <p:sldMasterId id="2147483660" r:id="rId1"/>
   </p:sldMasterIdLst>
   <p:notesMasterIdLst>
-    <p:notesMasterId r:id="rId36"/>
+    <p:notesMasterId r:id="rId37"/>
   </p:notesMasterIdLst>
   <p:sldIdLst>
     <p:sldId id="294" r:id="rId2"/>
@@ -35,13 +35,14 @@
     <p:sldId id="332" r:id="rId26"/>
     <p:sldId id="333" r:id="rId27"/>
     <p:sldId id="334" r:id="rId28"/>
-    <p:sldId id="335" r:id="rId29"/>
-    <p:sldId id="336" r:id="rId30"/>
-    <p:sldId id="337" r:id="rId31"/>
-    <p:sldId id="325" r:id="rId32"/>
-    <p:sldId id="326" r:id="rId33"/>
-    <p:sldId id="339" r:id="rId34"/>
-    <p:sldId id="312" r:id="rId35"/>
+    <p:sldId id="340" r:id="rId29"/>
+    <p:sldId id="335" r:id="rId30"/>
+    <p:sldId id="336" r:id="rId31"/>
+    <p:sldId id="337" r:id="rId32"/>
+    <p:sldId id="325" r:id="rId33"/>
+    <p:sldId id="326" r:id="rId34"/>
+    <p:sldId id="339" r:id="rId35"/>
+    <p:sldId id="312" r:id="rId36"/>
   </p:sldIdLst>
   <p:sldSz cx="12192000" cy="6858000"/>
   <p:notesSz cx="6858000" cy="9144000"/>
@@ -172,6 +173,7 @@
             <p14:sldId id="332"/>
             <p14:sldId id="333"/>
             <p14:sldId id="334"/>
+            <p14:sldId id="340"/>
             <p14:sldId id="335"/>
             <p14:sldId id="336"/>
             <p14:sldId id="337"/>
@@ -272,7 +274,7 @@
           <a:p>
             <a:fld id="{902671CA-AE16-4BF6-A4E6-C10FEA311FBA}" type="datetimeFigureOut">
               <a:rPr lang="en-IN" smtClean="0"/>
-              <a:t>06-04-2024</a:t>
+              <a:t>04-05-2024</a:t>
             </a:fld>
             <a:endParaRPr lang="en-IN"/>
           </a:p>
@@ -13186,7 +13188,7 @@
                 <a:cs typeface="Times New Roman" panose="02020603050405020304" pitchFamily="18" charset="0"/>
                 <a:sym typeface="Arial"/>
               </a:rPr>
-              <a:t>Design of  a Grammatical Error Correction Tool for Kannada Documents using BERT Model</a:t>
+              <a:t>Design of  Spell-checker and Grammar-checker for Kannada Documents</a:t>
             </a:r>
           </a:p>
           <a:p>
@@ -13218,7 +13220,7 @@
                 <a:cs typeface="Times New Roman" panose="02020603050405020304" pitchFamily="18" charset="0"/>
                 <a:sym typeface="Calibri"/>
               </a:rPr>
-              <a:t>-Phase 2 Review 2</a:t>
+              <a:t>-Phase 2 Review 3</a:t>
             </a:r>
             <a:endParaRPr lang="en-IN" sz="2800" b="1" kern="0" dirty="0">
               <a:solidFill>
@@ -17709,7 +17711,7 @@
                 <a:latin typeface="Times New Roman" panose="02020603050405020304" pitchFamily="18" charset="0"/>
                 <a:cs typeface="Times New Roman" panose="02020603050405020304" pitchFamily="18" charset="0"/>
               </a:rPr>
-              <a:t>User interface designed using HTML, CSS, and Bootstrap.</a:t>
+              <a:t>Frontend designed using HTML, CSS, and Bootstrap.</a:t>
             </a:r>
           </a:p>
           <a:p>
@@ -17729,7 +17731,7 @@
                 <a:latin typeface="Times New Roman" panose="02020603050405020304" pitchFamily="18" charset="0"/>
                 <a:cs typeface="Times New Roman" panose="02020603050405020304" pitchFamily="18" charset="0"/>
               </a:rPr>
-              <a:t>Facilitates seamless interaction between user and model.</a:t>
+              <a:t>Facilitates seamless interaction between user and the model.</a:t>
             </a:r>
           </a:p>
         </p:txBody>
@@ -17824,36 +17826,6 @@
           </a:p>
         </p:txBody>
       </p:sp>
-      <p:pic>
-        <p:nvPicPr>
-          <p:cNvPr id="3" name="Picture 2">
-            <a:extLst>
-              <a:ext uri="{FF2B5EF4-FFF2-40B4-BE49-F238E27FC236}">
-                <a16:creationId xmlns:a16="http://schemas.microsoft.com/office/drawing/2014/main" id="{E606AEDD-4835-547C-A8C2-A2F980C26564}"/>
-              </a:ext>
-            </a:extLst>
-          </p:cNvPr>
-          <p:cNvPicPr>
-            <a:picLocks noChangeAspect="1"/>
-          </p:cNvPicPr>
-          <p:nvPr/>
-        </p:nvPicPr>
-        <p:blipFill>
-          <a:blip r:embed="rId2"/>
-          <a:stretch>
-            <a:fillRect/>
-          </a:stretch>
-        </p:blipFill>
-        <p:spPr>
-          <a:xfrm>
-            <a:off x="764775" y="998622"/>
-            <a:ext cx="10179149" cy="4640431"/>
-          </a:xfrm>
-          <a:prstGeom prst="rect">
-            <a:avLst/>
-          </a:prstGeom>
-        </p:spPr>
-      </p:pic>
       <p:sp>
         <p:nvSpPr>
           <p:cNvPr id="4" name="TextBox 3">
@@ -17900,6 +17872,36 @@
           </a:p>
         </p:txBody>
       </p:sp>
+      <p:pic>
+        <p:nvPicPr>
+          <p:cNvPr id="5" name="Picture 4">
+            <a:extLst>
+              <a:ext uri="{FF2B5EF4-FFF2-40B4-BE49-F238E27FC236}">
+                <a16:creationId xmlns:a16="http://schemas.microsoft.com/office/drawing/2014/main" id="{BFB75596-43D5-1E06-49C5-2E0708E2BA4F}"/>
+              </a:ext>
+            </a:extLst>
+          </p:cNvPr>
+          <p:cNvPicPr>
+            <a:picLocks noChangeAspect="1"/>
+          </p:cNvPicPr>
+          <p:nvPr/>
+        </p:nvPicPr>
+        <p:blipFill>
+          <a:blip r:embed="rId2"/>
+          <a:stretch>
+            <a:fillRect/>
+          </a:stretch>
+        </p:blipFill>
+        <p:spPr>
+          <a:xfrm>
+            <a:off x="1203159" y="1299411"/>
+            <a:ext cx="9519384" cy="4302492"/>
+          </a:xfrm>
+          <a:prstGeom prst="rect">
+            <a:avLst/>
+          </a:prstGeom>
+        </p:spPr>
+      </p:pic>
     </p:spTree>
     <p:extLst>
       <p:ext uri="{BB962C8B-B14F-4D97-AF65-F5344CB8AC3E}">
@@ -18209,6 +18211,354 @@
           <p:cNvPr id="2" name="Slide Number Placeholder 1">
             <a:extLst>
               <a:ext uri="{FF2B5EF4-FFF2-40B4-BE49-F238E27FC236}">
+                <a16:creationId xmlns:a16="http://schemas.microsoft.com/office/drawing/2014/main" id="{EF96C633-A9EC-B8E0-7794-3B5F63BD6A6E}"/>
+              </a:ext>
+            </a:extLst>
+          </p:cNvPr>
+          <p:cNvSpPr>
+            <a:spLocks noGrp="1"/>
+          </p:cNvSpPr>
+          <p:nvPr>
+            <p:ph type="sldNum" idx="12"/>
+          </p:nvPr>
+        </p:nvSpPr>
+        <p:spPr/>
+        <p:txBody>
+          <a:bodyPr/>
+          <a:lstStyle/>
+          <a:p>
+            <a:fld id="{00000000-1234-1234-1234-123412341234}" type="slidenum">
+              <a:rPr lang="en" smtClean="0"/>
+              <a:pPr/>
+              <a:t>28</a:t>
+            </a:fld>
+            <a:endParaRPr lang="en"/>
+          </a:p>
+        </p:txBody>
+      </p:sp>
+      <p:sp>
+        <p:nvSpPr>
+          <p:cNvPr id="5" name="TextBox 4">
+            <a:extLst>
+              <a:ext uri="{FF2B5EF4-FFF2-40B4-BE49-F238E27FC236}">
+                <a16:creationId xmlns:a16="http://schemas.microsoft.com/office/drawing/2014/main" id="{4D851D96-4B0F-6DFC-282D-4788E219A52C}"/>
+              </a:ext>
+            </a:extLst>
+          </p:cNvPr>
+          <p:cNvSpPr txBox="1"/>
+          <p:nvPr/>
+        </p:nvSpPr>
+        <p:spPr>
+          <a:xfrm>
+            <a:off x="240632" y="5505651"/>
+            <a:ext cx="4781549" cy="642805"/>
+          </a:xfrm>
+          <a:prstGeom prst="rect">
+            <a:avLst/>
+          </a:prstGeom>
+          <a:noFill/>
+        </p:spPr>
+        <p:txBody>
+          <a:bodyPr wrap="square" rtlCol="0">
+            <a:spAutoFit/>
+          </a:bodyPr>
+          <a:lstStyle/>
+          <a:p>
+            <a:pPr marL="0" marR="0" algn="just">
+              <a:lnSpc>
+                <a:spcPct val="150000"/>
+              </a:lnSpc>
+              <a:spcBef>
+                <a:spcPts val="0"/>
+              </a:spcBef>
+              <a:spcAft>
+                <a:spcPts val="0"/>
+              </a:spcAft>
+            </a:pPr>
+            <a:r>
+              <a:rPr lang="en-US" sz="2670" dirty="0">
+                <a:solidFill>
+                  <a:srgbClr val="222222"/>
+                </a:solidFill>
+                <a:effectLst/>
+                <a:highlight>
+                  <a:srgbClr val="FFFFFF"/>
+                </a:highlight>
+                <a:latin typeface="Times New Roman" panose="02020603050405020304" pitchFamily="18" charset="0"/>
+                <a:ea typeface="Calibri" panose="020F0502020204030204" pitchFamily="34" charset="0"/>
+              </a:rPr>
+              <a:t>Figure 10- </a:t>
+            </a:r>
+            <a:r>
+              <a:rPr lang="en-US" sz="2670" kern="100" dirty="0">
+                <a:solidFill>
+                  <a:srgbClr val="222222"/>
+                </a:solidFill>
+                <a:effectLst/>
+                <a:highlight>
+                  <a:srgbClr val="FFFFFF"/>
+                </a:highlight>
+                <a:latin typeface="Times New Roman" panose="02020603050405020304" pitchFamily="18" charset="0"/>
+                <a:ea typeface="Calibri" panose="020F0502020204030204" pitchFamily="34" charset="0"/>
+                <a:cs typeface="Tunga" panose="020B0502040204020203" pitchFamily="34" charset="0"/>
+              </a:rPr>
+              <a:t>Spell-checker input</a:t>
+            </a:r>
+            <a:endParaRPr lang="en-US" sz="2670" kern="100" dirty="0">
+              <a:effectLst/>
+              <a:latin typeface="Calibri" panose="020F0502020204030204" pitchFamily="34" charset="0"/>
+              <a:ea typeface="Calibri" panose="020F0502020204030204" pitchFamily="34" charset="0"/>
+              <a:cs typeface="Tunga" panose="020B0502040204020203" pitchFamily="34" charset="0"/>
+            </a:endParaRPr>
+          </a:p>
+        </p:txBody>
+      </p:sp>
+      <p:sp>
+        <p:nvSpPr>
+          <p:cNvPr id="6" name="TextBox 5">
+            <a:extLst>
+              <a:ext uri="{FF2B5EF4-FFF2-40B4-BE49-F238E27FC236}">
+                <a16:creationId xmlns:a16="http://schemas.microsoft.com/office/drawing/2014/main" id="{3FCA1E57-EE50-F248-FEF4-B3D9E9116685}"/>
+              </a:ext>
+            </a:extLst>
+          </p:cNvPr>
+          <p:cNvSpPr txBox="1"/>
+          <p:nvPr/>
+        </p:nvSpPr>
+        <p:spPr>
+          <a:xfrm>
+            <a:off x="5232343" y="3955983"/>
+            <a:ext cx="5442074" cy="1875450"/>
+          </a:xfrm>
+          <a:prstGeom prst="rect">
+            <a:avLst/>
+          </a:prstGeom>
+          <a:noFill/>
+        </p:spPr>
+        <p:txBody>
+          <a:bodyPr wrap="square" rtlCol="0">
+            <a:spAutoFit/>
+          </a:bodyPr>
+          <a:lstStyle/>
+          <a:p>
+            <a:pPr marL="0" marR="0" algn="just">
+              <a:lnSpc>
+                <a:spcPct val="150000"/>
+              </a:lnSpc>
+              <a:spcBef>
+                <a:spcPts val="0"/>
+              </a:spcBef>
+              <a:spcAft>
+                <a:spcPts val="0"/>
+              </a:spcAft>
+            </a:pPr>
+            <a:endParaRPr lang="en-US" sz="2670" dirty="0">
+              <a:solidFill>
+                <a:srgbClr val="222222"/>
+              </a:solidFill>
+              <a:effectLst/>
+              <a:highlight>
+                <a:srgbClr val="FFFFFF"/>
+              </a:highlight>
+              <a:latin typeface="Times New Roman" panose="02020603050405020304" pitchFamily="18" charset="0"/>
+              <a:ea typeface="Calibri" panose="020F0502020204030204" pitchFamily="34" charset="0"/>
+            </a:endParaRPr>
+          </a:p>
+          <a:p>
+            <a:pPr marL="0" marR="0" algn="just">
+              <a:lnSpc>
+                <a:spcPct val="150000"/>
+              </a:lnSpc>
+              <a:spcBef>
+                <a:spcPts val="0"/>
+              </a:spcBef>
+              <a:spcAft>
+                <a:spcPts val="0"/>
+              </a:spcAft>
+            </a:pPr>
+            <a:endParaRPr lang="en-US" sz="2670" dirty="0">
+              <a:solidFill>
+                <a:srgbClr val="222222"/>
+              </a:solidFill>
+              <a:highlight>
+                <a:srgbClr val="FFFFFF"/>
+              </a:highlight>
+              <a:latin typeface="Times New Roman" panose="02020603050405020304" pitchFamily="18" charset="0"/>
+              <a:ea typeface="Calibri" panose="020F0502020204030204" pitchFamily="34" charset="0"/>
+            </a:endParaRPr>
+          </a:p>
+          <a:p>
+            <a:pPr marL="0" marR="0" algn="just">
+              <a:lnSpc>
+                <a:spcPct val="150000"/>
+              </a:lnSpc>
+              <a:spcBef>
+                <a:spcPts val="0"/>
+              </a:spcBef>
+              <a:spcAft>
+                <a:spcPts val="0"/>
+              </a:spcAft>
+            </a:pPr>
+            <a:r>
+              <a:rPr lang="en-US" sz="2670" dirty="0">
+                <a:solidFill>
+                  <a:srgbClr val="222222"/>
+                </a:solidFill>
+                <a:effectLst/>
+                <a:highlight>
+                  <a:srgbClr val="FFFFFF"/>
+                </a:highlight>
+                <a:latin typeface="Times New Roman" panose="02020603050405020304" pitchFamily="18" charset="0"/>
+                <a:ea typeface="Calibri" panose="020F0502020204030204" pitchFamily="34" charset="0"/>
+              </a:rPr>
+              <a:t>Figure </a:t>
+            </a:r>
+            <a:r>
+              <a:rPr lang="en-US" sz="2670" dirty="0">
+                <a:solidFill>
+                  <a:srgbClr val="222222"/>
+                </a:solidFill>
+                <a:highlight>
+                  <a:srgbClr val="FFFFFF"/>
+                </a:highlight>
+                <a:latin typeface="Times New Roman" panose="02020603050405020304" pitchFamily="18" charset="0"/>
+                <a:ea typeface="Calibri" panose="020F0502020204030204" pitchFamily="34" charset="0"/>
+              </a:rPr>
+              <a:t>11</a:t>
+            </a:r>
+            <a:r>
+              <a:rPr lang="en-US" sz="2670" dirty="0">
+                <a:solidFill>
+                  <a:srgbClr val="222222"/>
+                </a:solidFill>
+                <a:effectLst/>
+                <a:highlight>
+                  <a:srgbClr val="FFFFFF"/>
+                </a:highlight>
+                <a:latin typeface="Times New Roman" panose="02020603050405020304" pitchFamily="18" charset="0"/>
+                <a:ea typeface="Calibri" panose="020F0502020204030204" pitchFamily="34" charset="0"/>
+              </a:rPr>
+              <a:t>- </a:t>
+            </a:r>
+            <a:r>
+              <a:rPr lang="en-US" sz="2670" kern="100" dirty="0">
+                <a:solidFill>
+                  <a:srgbClr val="222222"/>
+                </a:solidFill>
+                <a:effectLst/>
+                <a:highlight>
+                  <a:srgbClr val="FFFFFF"/>
+                </a:highlight>
+                <a:latin typeface="Times New Roman" panose="02020603050405020304" pitchFamily="18" charset="0"/>
+                <a:ea typeface="Calibri" panose="020F0502020204030204" pitchFamily="34" charset="0"/>
+                <a:cs typeface="Tunga" panose="020B0502040204020203" pitchFamily="34" charset="0"/>
+              </a:rPr>
+              <a:t>Spell-checker output</a:t>
+            </a:r>
+            <a:endParaRPr lang="en-US" sz="2670" kern="100" dirty="0">
+              <a:effectLst/>
+              <a:latin typeface="Calibri" panose="020F0502020204030204" pitchFamily="34" charset="0"/>
+              <a:ea typeface="Calibri" panose="020F0502020204030204" pitchFamily="34" charset="0"/>
+              <a:cs typeface="Tunga" panose="020B0502040204020203" pitchFamily="34" charset="0"/>
+            </a:endParaRPr>
+          </a:p>
+        </p:txBody>
+      </p:sp>
+      <p:pic>
+        <p:nvPicPr>
+          <p:cNvPr id="7" name="Picture 6">
+            <a:extLst>
+              <a:ext uri="{FF2B5EF4-FFF2-40B4-BE49-F238E27FC236}">
+                <a16:creationId xmlns:a16="http://schemas.microsoft.com/office/drawing/2014/main" id="{8E017579-8CD6-FCA9-AF8F-6D2748FB5EA2}"/>
+              </a:ext>
+            </a:extLst>
+          </p:cNvPr>
+          <p:cNvPicPr>
+            <a:picLocks noChangeAspect="1"/>
+          </p:cNvPicPr>
+          <p:nvPr/>
+        </p:nvPicPr>
+        <p:blipFill>
+          <a:blip r:embed="rId2"/>
+          <a:stretch>
+            <a:fillRect/>
+          </a:stretch>
+        </p:blipFill>
+        <p:spPr>
+          <a:xfrm>
+            <a:off x="240632" y="1411604"/>
+            <a:ext cx="3776746" cy="3921208"/>
+          </a:xfrm>
+          <a:prstGeom prst="rect">
+            <a:avLst/>
+          </a:prstGeom>
+        </p:spPr>
+      </p:pic>
+      <p:pic>
+        <p:nvPicPr>
+          <p:cNvPr id="8" name="Picture 7">
+            <a:extLst>
+              <a:ext uri="{FF2B5EF4-FFF2-40B4-BE49-F238E27FC236}">
+                <a16:creationId xmlns:a16="http://schemas.microsoft.com/office/drawing/2014/main" id="{C3B10C3C-E534-82EB-5D61-4691FF292501}"/>
+              </a:ext>
+            </a:extLst>
+          </p:cNvPr>
+          <p:cNvPicPr>
+            <a:picLocks noChangeAspect="1"/>
+          </p:cNvPicPr>
+          <p:nvPr/>
+        </p:nvPicPr>
+        <p:blipFill>
+          <a:blip r:embed="rId3"/>
+          <a:stretch>
+            <a:fillRect/>
+          </a:stretch>
+        </p:blipFill>
+        <p:spPr>
+          <a:xfrm>
+            <a:off x="4273617" y="1411604"/>
+            <a:ext cx="7594332" cy="3921208"/>
+          </a:xfrm>
+          <a:prstGeom prst="rect">
+            <a:avLst/>
+          </a:prstGeom>
+        </p:spPr>
+      </p:pic>
+    </p:spTree>
+    <p:extLst>
+      <p:ext uri="{BB962C8B-B14F-4D97-AF65-F5344CB8AC3E}">
+        <p14:creationId xmlns:p14="http://schemas.microsoft.com/office/powerpoint/2010/main" val="496535757"/>
+      </p:ext>
+    </p:extLst>
+  </p:cSld>
+  <p:clrMapOvr>
+    <a:masterClrMapping/>
+  </p:clrMapOvr>
+</p:sld>
+</file>
+
+<file path=ppt/slides/slide29.xml><?xml version="1.0" encoding="utf-8"?>
+<p:sld xmlns:a="http://schemas.openxmlformats.org/drawingml/2006/main" xmlns:r="http://schemas.openxmlformats.org/officeDocument/2006/relationships" xmlns:p="http://schemas.openxmlformats.org/presentationml/2006/main">
+  <p:cSld>
+    <p:spTree>
+      <p:nvGrpSpPr>
+        <p:cNvPr id="1" name=""/>
+        <p:cNvGrpSpPr/>
+        <p:nvPr/>
+      </p:nvGrpSpPr>
+      <p:grpSpPr>
+        <a:xfrm>
+          <a:off x="0" y="0"/>
+          <a:ext cx="0" cy="0"/>
+          <a:chOff x="0" y="0"/>
+          <a:chExt cx="0" cy="0"/>
+        </a:xfrm>
+      </p:grpSpPr>
+      <p:sp>
+        <p:nvSpPr>
+          <p:cNvPr id="2" name="Slide Number Placeholder 1">
+            <a:extLst>
+              <a:ext uri="{FF2B5EF4-FFF2-40B4-BE49-F238E27FC236}">
                 <a16:creationId xmlns:a16="http://schemas.microsoft.com/office/drawing/2014/main" id="{F117EEC2-0B0A-540E-533E-F1B669523D94}"/>
               </a:ext>
             </a:extLst>
@@ -18228,7 +18578,7 @@
             <a:fld id="{00000000-1234-1234-1234-123412341234}" type="slidenum">
               <a:rPr lang="en" smtClean="0"/>
               <a:pPr/>
-              <a:t>28</a:t>
+              <a:t>29</a:t>
             </a:fld>
             <a:endParaRPr lang="en"/>
           </a:p>
@@ -18345,7 +18695,7 @@
                 <a:latin typeface="Times New Roman" panose="02020603050405020304" pitchFamily="18" charset="0"/>
                 <a:ea typeface="Calibri" panose="020F0502020204030204" pitchFamily="34" charset="0"/>
               </a:rPr>
-              <a:t>Figure 10- </a:t>
+              <a:t>Figure 12- </a:t>
             </a:r>
             <a:r>
               <a:rPr lang="en-US" sz="2670" kern="100" dirty="0">
@@ -18422,7 +18772,7 @@
                 <a:latin typeface="Times New Roman" panose="02020603050405020304" pitchFamily="18" charset="0"/>
                 <a:ea typeface="Calibri" panose="020F0502020204030204" pitchFamily="34" charset="0"/>
               </a:rPr>
-              <a:t>Figure 11- </a:t>
+              <a:t>Figure 13- </a:t>
             </a:r>
             <a:r>
               <a:rPr lang="en-US" sz="2670" kern="100" dirty="0">
@@ -18461,7 +18811,168 @@
 </p:sld>
 </file>
 
-<file path=ppt/slides/slide29.xml><?xml version="1.0" encoding="utf-8"?>
+<file path=ppt/slides/slide3.xml><?xml version="1.0" encoding="utf-8"?>
+<p:sld xmlns:a="http://schemas.openxmlformats.org/drawingml/2006/main" xmlns:r="http://schemas.openxmlformats.org/officeDocument/2006/relationships" xmlns:p="http://schemas.openxmlformats.org/presentationml/2006/main">
+  <p:cSld>
+    <p:spTree>
+      <p:nvGrpSpPr>
+        <p:cNvPr id="1" name=""/>
+        <p:cNvGrpSpPr/>
+        <p:nvPr/>
+      </p:nvGrpSpPr>
+      <p:grpSpPr>
+        <a:xfrm>
+          <a:off x="0" y="0"/>
+          <a:ext cx="0" cy="0"/>
+          <a:chOff x="0" y="0"/>
+          <a:chExt cx="0" cy="0"/>
+        </a:xfrm>
+      </p:grpSpPr>
+      <p:sp>
+        <p:nvSpPr>
+          <p:cNvPr id="2" name="Title 1">
+            <a:extLst>
+              <a:ext uri="{FF2B5EF4-FFF2-40B4-BE49-F238E27FC236}">
+                <a16:creationId xmlns:a16="http://schemas.microsoft.com/office/drawing/2014/main" id="{7C85271A-6E17-11C4-4F13-B55D9B030A3A}"/>
+              </a:ext>
+            </a:extLst>
+          </p:cNvPr>
+          <p:cNvSpPr>
+            <a:spLocks noGrp="1"/>
+          </p:cNvSpPr>
+          <p:nvPr>
+            <p:ph type="title"/>
+          </p:nvPr>
+        </p:nvSpPr>
+        <p:spPr>
+          <a:xfrm>
+            <a:off x="609600" y="647676"/>
+            <a:ext cx="10972800" cy="1143000"/>
+          </a:xfrm>
+        </p:spPr>
+        <p:txBody>
+          <a:bodyPr/>
+          <a:lstStyle/>
+          <a:p>
+            <a:r>
+              <a:rPr lang="en-IN" sz="4800" b="1" kern="100" dirty="0">
+                <a:latin typeface="Times New Roman" panose="02020603050405020304" pitchFamily="18" charset="0"/>
+                <a:ea typeface="Calibri" panose="020F0502020204030204" pitchFamily="34" charset="0"/>
+                <a:cs typeface="Times New Roman" panose="02020603050405020304" pitchFamily="18" charset="0"/>
+              </a:rPr>
+              <a:t>Problem statement</a:t>
+            </a:r>
+            <a:br>
+              <a:rPr lang="en-IN" sz="4800" kern="100" dirty="0">
+                <a:latin typeface="Times New Roman" panose="02020603050405020304" pitchFamily="18" charset="0"/>
+                <a:ea typeface="Calibri" panose="020F0502020204030204" pitchFamily="34" charset="0"/>
+                <a:cs typeface="Times New Roman" panose="02020603050405020304" pitchFamily="18" charset="0"/>
+              </a:rPr>
+            </a:br>
+            <a:endParaRPr lang="en-IN" sz="4800" dirty="0">
+              <a:latin typeface="Times New Roman" panose="02020603050405020304" pitchFamily="18" charset="0"/>
+              <a:cs typeface="Times New Roman" panose="02020603050405020304" pitchFamily="18" charset="0"/>
+            </a:endParaRPr>
+          </a:p>
+        </p:txBody>
+      </p:sp>
+      <p:sp>
+        <p:nvSpPr>
+          <p:cNvPr id="3" name="Text Placeholder 2">
+            <a:extLst>
+              <a:ext uri="{FF2B5EF4-FFF2-40B4-BE49-F238E27FC236}">
+                <a16:creationId xmlns:a16="http://schemas.microsoft.com/office/drawing/2014/main" id="{6B34EFEE-02C0-E73B-A22D-90E11D21E4ED}"/>
+              </a:ext>
+            </a:extLst>
+          </p:cNvPr>
+          <p:cNvSpPr>
+            <a:spLocks noGrp="1"/>
+          </p:cNvSpPr>
+          <p:nvPr>
+            <p:ph type="body" idx="1"/>
+          </p:nvPr>
+        </p:nvSpPr>
+        <p:spPr>
+          <a:xfrm>
+            <a:off x="609600" y="1418229"/>
+            <a:ext cx="10972800" cy="4525963"/>
+          </a:xfrm>
+        </p:spPr>
+        <p:txBody>
+          <a:bodyPr/>
+          <a:lstStyle/>
+          <a:p>
+            <a:pPr algn="just">
+              <a:lnSpc>
+                <a:spcPct val="150000"/>
+              </a:lnSpc>
+              <a:spcAft>
+                <a:spcPts val="800"/>
+              </a:spcAft>
+            </a:pPr>
+            <a:r>
+              <a:rPr lang="en-US" sz="2670" kern="100" dirty="0">
+                <a:effectLst/>
+                <a:latin typeface="Times New Roman" panose="02020603050405020304" pitchFamily="18" charset="0"/>
+                <a:ea typeface="Aptos" panose="020B0004020202020204" pitchFamily="34" charset="0"/>
+                <a:cs typeface="Tunga" panose="020B0502040204020203" pitchFamily="34" charset="0"/>
+              </a:rPr>
+              <a:t>Kannada has a unique linguistic structure, and publicly no Kannada grammar-correcting tools are available. Hence development of a tool to fix spelling and grammar errors in Kannada documents is proposed in this project.</a:t>
+            </a:r>
+            <a:endParaRPr lang="en-IN" sz="2670" kern="100" dirty="0">
+              <a:effectLst/>
+              <a:latin typeface="Aptos" panose="020B0004020202020204" pitchFamily="34" charset="0"/>
+              <a:ea typeface="Aptos" panose="020B0004020202020204" pitchFamily="34" charset="0"/>
+              <a:cs typeface="Tunga" panose="020B0502040204020203" pitchFamily="34" charset="0"/>
+            </a:endParaRPr>
+          </a:p>
+        </p:txBody>
+      </p:sp>
+      <p:sp>
+        <p:nvSpPr>
+          <p:cNvPr id="4" name="Slide Number Placeholder 3">
+            <a:extLst>
+              <a:ext uri="{FF2B5EF4-FFF2-40B4-BE49-F238E27FC236}">
+                <a16:creationId xmlns:a16="http://schemas.microsoft.com/office/drawing/2014/main" id="{81072719-5A03-1646-C86D-86D0C6C41C17}"/>
+              </a:ext>
+            </a:extLst>
+          </p:cNvPr>
+          <p:cNvSpPr>
+            <a:spLocks noGrp="1"/>
+          </p:cNvSpPr>
+          <p:nvPr>
+            <p:ph type="sldNum" idx="12"/>
+          </p:nvPr>
+        </p:nvSpPr>
+        <p:spPr/>
+        <p:txBody>
+          <a:bodyPr/>
+          <a:lstStyle/>
+          <a:p>
+            <a:pPr defTabSz="1219170"/>
+            <a:fld id="{00000000-1234-1234-1234-123412341234}" type="slidenum">
+              <a:rPr lang="en" kern="0"/>
+              <a:pPr defTabSz="1219170"/>
+              <a:t>3</a:t>
+            </a:fld>
+            <a:endParaRPr lang="en" kern="0"/>
+          </a:p>
+        </p:txBody>
+      </p:sp>
+    </p:spTree>
+    <p:extLst>
+      <p:ext uri="{BB962C8B-B14F-4D97-AF65-F5344CB8AC3E}">
+        <p14:creationId xmlns:p14="http://schemas.microsoft.com/office/powerpoint/2010/main" val="1089863122"/>
+      </p:ext>
+    </p:extLst>
+  </p:cSld>
+  <p:clrMapOvr>
+    <a:masterClrMapping/>
+  </p:clrMapOvr>
+</p:sld>
+</file>
+
+<file path=ppt/slides/slide30.xml><?xml version="1.0" encoding="utf-8"?>
 <p:sld xmlns:a="http://schemas.openxmlformats.org/drawingml/2006/main" xmlns:r="http://schemas.openxmlformats.org/officeDocument/2006/relationships" xmlns:p="http://schemas.openxmlformats.org/presentationml/2006/main">
   <p:cSld>
     <p:spTree>
@@ -18502,7 +19013,7 @@
             <a:fld id="{00000000-1234-1234-1234-123412341234}" type="slidenum">
               <a:rPr lang="en" smtClean="0"/>
               <a:pPr/>
-              <a:t>29</a:t>
+              <a:t>30</a:t>
             </a:fld>
             <a:endParaRPr lang="en"/>
           </a:p>
@@ -18619,7 +19130,7 @@
                 <a:latin typeface="Times New Roman" panose="02020603050405020304" pitchFamily="18" charset="0"/>
                 <a:ea typeface="Calibri" panose="020F0502020204030204" pitchFamily="34" charset="0"/>
               </a:rPr>
-              <a:t>Figure 12- </a:t>
+              <a:t>Figure 14- </a:t>
             </a:r>
             <a:r>
               <a:rPr lang="en-US" sz="2670" kern="100" dirty="0">
@@ -18696,7 +19207,7 @@
                 <a:latin typeface="Times New Roman" panose="02020603050405020304" pitchFamily="18" charset="0"/>
                 <a:ea typeface="Calibri" panose="020F0502020204030204" pitchFamily="34" charset="0"/>
               </a:rPr>
-              <a:t>Figure 13- </a:t>
+              <a:t>Figure 15- </a:t>
             </a:r>
             <a:r>
               <a:rPr lang="en-US" sz="2670" kern="100" dirty="0">
@@ -18735,166 +19246,7 @@
 </p:sld>
 </file>
 
-<file path=ppt/slides/slide3.xml><?xml version="1.0" encoding="utf-8"?>
-<p:sld xmlns:a="http://schemas.openxmlformats.org/drawingml/2006/main" xmlns:r="http://schemas.openxmlformats.org/officeDocument/2006/relationships" xmlns:p="http://schemas.openxmlformats.org/presentationml/2006/main">
-  <p:cSld>
-    <p:spTree>
-      <p:nvGrpSpPr>
-        <p:cNvPr id="1" name=""/>
-        <p:cNvGrpSpPr/>
-        <p:nvPr/>
-      </p:nvGrpSpPr>
-      <p:grpSpPr>
-        <a:xfrm>
-          <a:off x="0" y="0"/>
-          <a:ext cx="0" cy="0"/>
-          <a:chOff x="0" y="0"/>
-          <a:chExt cx="0" cy="0"/>
-        </a:xfrm>
-      </p:grpSpPr>
-      <p:sp>
-        <p:nvSpPr>
-          <p:cNvPr id="2" name="Title 1">
-            <a:extLst>
-              <a:ext uri="{FF2B5EF4-FFF2-40B4-BE49-F238E27FC236}">
-                <a16:creationId xmlns:a16="http://schemas.microsoft.com/office/drawing/2014/main" id="{7C85271A-6E17-11C4-4F13-B55D9B030A3A}"/>
-              </a:ext>
-            </a:extLst>
-          </p:cNvPr>
-          <p:cNvSpPr>
-            <a:spLocks noGrp="1"/>
-          </p:cNvSpPr>
-          <p:nvPr>
-            <p:ph type="title"/>
-          </p:nvPr>
-        </p:nvSpPr>
-        <p:spPr>
-          <a:xfrm>
-            <a:off x="609600" y="647676"/>
-            <a:ext cx="10972800" cy="1143000"/>
-          </a:xfrm>
-        </p:spPr>
-        <p:txBody>
-          <a:bodyPr/>
-          <a:lstStyle/>
-          <a:p>
-            <a:r>
-              <a:rPr lang="en-IN" sz="4800" b="1" kern="100" dirty="0">
-                <a:latin typeface="Times New Roman" panose="02020603050405020304" pitchFamily="18" charset="0"/>
-                <a:ea typeface="Calibri" panose="020F0502020204030204" pitchFamily="34" charset="0"/>
-                <a:cs typeface="Times New Roman" panose="02020603050405020304" pitchFamily="18" charset="0"/>
-              </a:rPr>
-              <a:t>Problem statement</a:t>
-            </a:r>
-            <a:br>
-              <a:rPr lang="en-IN" sz="4800" kern="100" dirty="0">
-                <a:latin typeface="Times New Roman" panose="02020603050405020304" pitchFamily="18" charset="0"/>
-                <a:ea typeface="Calibri" panose="020F0502020204030204" pitchFamily="34" charset="0"/>
-                <a:cs typeface="Times New Roman" panose="02020603050405020304" pitchFamily="18" charset="0"/>
-              </a:rPr>
-            </a:br>
-            <a:endParaRPr lang="en-IN" sz="4800" dirty="0">
-              <a:latin typeface="Times New Roman" panose="02020603050405020304" pitchFamily="18" charset="0"/>
-              <a:cs typeface="Times New Roman" panose="02020603050405020304" pitchFamily="18" charset="0"/>
-            </a:endParaRPr>
-          </a:p>
-        </p:txBody>
-      </p:sp>
-      <p:sp>
-        <p:nvSpPr>
-          <p:cNvPr id="3" name="Text Placeholder 2">
-            <a:extLst>
-              <a:ext uri="{FF2B5EF4-FFF2-40B4-BE49-F238E27FC236}">
-                <a16:creationId xmlns:a16="http://schemas.microsoft.com/office/drawing/2014/main" id="{6B34EFEE-02C0-E73B-A22D-90E11D21E4ED}"/>
-              </a:ext>
-            </a:extLst>
-          </p:cNvPr>
-          <p:cNvSpPr>
-            <a:spLocks noGrp="1"/>
-          </p:cNvSpPr>
-          <p:nvPr>
-            <p:ph type="body" idx="1"/>
-          </p:nvPr>
-        </p:nvSpPr>
-        <p:spPr>
-          <a:xfrm>
-            <a:off x="609600" y="1418229"/>
-            <a:ext cx="10972800" cy="4525963"/>
-          </a:xfrm>
-        </p:spPr>
-        <p:txBody>
-          <a:bodyPr/>
-          <a:lstStyle/>
-          <a:p>
-            <a:pPr marL="152396" indent="0" algn="just">
-              <a:lnSpc>
-                <a:spcPct val="150000"/>
-              </a:lnSpc>
-              <a:spcAft>
-                <a:spcPts val="1067"/>
-              </a:spcAft>
-              <a:buNone/>
-            </a:pPr>
-            <a:r>
-              <a:rPr lang="en-IN" sz="2667" kern="100" dirty="0">
-                <a:latin typeface="Times New Roman" panose="02020603050405020304" pitchFamily="18" charset="0"/>
-                <a:ea typeface="Calibri" panose="020F0502020204030204" pitchFamily="34" charset="0"/>
-                <a:cs typeface="Times New Roman" panose="02020603050405020304" pitchFamily="18" charset="0"/>
-              </a:rPr>
-              <a:t>Kannada has unique linguistic structure, and publicly no Kannada grammar correcting tools are available. Hence development of a tool to fix grammar errors in Kannada documents using the BERT model is proposed in this project.</a:t>
-            </a:r>
-            <a:endParaRPr lang="en-IN" sz="2667" dirty="0">
-              <a:latin typeface="Times New Roman" panose="02020603050405020304" pitchFamily="18" charset="0"/>
-              <a:cs typeface="Times New Roman" panose="02020603050405020304" pitchFamily="18" charset="0"/>
-            </a:endParaRPr>
-          </a:p>
-        </p:txBody>
-      </p:sp>
-      <p:sp>
-        <p:nvSpPr>
-          <p:cNvPr id="4" name="Slide Number Placeholder 3">
-            <a:extLst>
-              <a:ext uri="{FF2B5EF4-FFF2-40B4-BE49-F238E27FC236}">
-                <a16:creationId xmlns:a16="http://schemas.microsoft.com/office/drawing/2014/main" id="{81072719-5A03-1646-C86D-86D0C6C41C17}"/>
-              </a:ext>
-            </a:extLst>
-          </p:cNvPr>
-          <p:cNvSpPr>
-            <a:spLocks noGrp="1"/>
-          </p:cNvSpPr>
-          <p:nvPr>
-            <p:ph type="sldNum" idx="12"/>
-          </p:nvPr>
-        </p:nvSpPr>
-        <p:spPr/>
-        <p:txBody>
-          <a:bodyPr/>
-          <a:lstStyle/>
-          <a:p>
-            <a:pPr defTabSz="1219170"/>
-            <a:fld id="{00000000-1234-1234-1234-123412341234}" type="slidenum">
-              <a:rPr lang="en" kern="0"/>
-              <a:pPr defTabSz="1219170"/>
-              <a:t>3</a:t>
-            </a:fld>
-            <a:endParaRPr lang="en" kern="0"/>
-          </a:p>
-        </p:txBody>
-      </p:sp>
-    </p:spTree>
-    <p:extLst>
-      <p:ext uri="{BB962C8B-B14F-4D97-AF65-F5344CB8AC3E}">
-        <p14:creationId xmlns:p14="http://schemas.microsoft.com/office/powerpoint/2010/main" val="1089863122"/>
-      </p:ext>
-    </p:extLst>
-  </p:cSld>
-  <p:clrMapOvr>
-    <a:masterClrMapping/>
-  </p:clrMapOvr>
-</p:sld>
-</file>
-
-<file path=ppt/slides/slide30.xml><?xml version="1.0" encoding="utf-8"?>
+<file path=ppt/slides/slide31.xml><?xml version="1.0" encoding="utf-8"?>
 <p:sld xmlns:a="http://schemas.openxmlformats.org/drawingml/2006/main" xmlns:r="http://schemas.openxmlformats.org/officeDocument/2006/relationships" xmlns:p="http://schemas.openxmlformats.org/presentationml/2006/main">
   <p:cSld>
     <p:spTree>
@@ -18935,7 +19287,7 @@
             <a:fld id="{00000000-1234-1234-1234-123412341234}" type="slidenum">
               <a:rPr lang="en" smtClean="0"/>
               <a:pPr/>
-              <a:t>30</a:t>
+              <a:t>31</a:t>
             </a:fld>
             <a:endParaRPr lang="en"/>
           </a:p>
@@ -19041,7 +19393,7 @@
                 <a:latin typeface="Times New Roman" panose="02020603050405020304" pitchFamily="18" charset="0"/>
                 <a:ea typeface="Calibri" panose="020F0502020204030204" pitchFamily="34" charset="0"/>
               </a:rPr>
-              <a:t>Figure 14- </a:t>
+              <a:t>Figure 16- </a:t>
             </a:r>
             <a:r>
               <a:rPr lang="en-US" sz="2670" dirty="0">
@@ -19102,7 +19454,7 @@
                 <a:latin typeface="Times New Roman" panose="02020603050405020304" pitchFamily="18" charset="0"/>
                 <a:ea typeface="Calibri" panose="020F0502020204030204" pitchFamily="34" charset="0"/>
               </a:rPr>
-              <a:t>Figure 15- </a:t>
+              <a:t>Figure 17- </a:t>
             </a:r>
             <a:r>
               <a:rPr lang="en-US" sz="2670" dirty="0">
@@ -19136,7 +19488,7 @@
 </p:sld>
 </file>
 
-<file path=ppt/slides/slide31.xml><?xml version="1.0" encoding="utf-8"?>
+<file path=ppt/slides/slide32.xml><?xml version="1.0" encoding="utf-8"?>
 <p:sld xmlns:a="http://schemas.openxmlformats.org/drawingml/2006/main" xmlns:r="http://schemas.openxmlformats.org/officeDocument/2006/relationships" xmlns:p="http://schemas.openxmlformats.org/presentationml/2006/main">
   <p:cSld>
     <p:spTree>
@@ -19319,7 +19671,7 @@
             <a:fld id="{00000000-1234-1234-1234-123412341234}" type="slidenum">
               <a:rPr lang="en" smtClean="0"/>
               <a:pPr/>
-              <a:t>31</a:t>
+              <a:t>32</a:t>
             </a:fld>
             <a:endParaRPr lang="en"/>
           </a:p>
@@ -19338,7 +19690,7 @@
 </p:sld>
 </file>
 
-<file path=ppt/slides/slide32.xml><?xml version="1.0" encoding="utf-8"?>
+<file path=ppt/slides/slide33.xml><?xml version="1.0" encoding="utf-8"?>
 <p:sld xmlns:a="http://schemas.openxmlformats.org/drawingml/2006/main" xmlns:r="http://schemas.openxmlformats.org/officeDocument/2006/relationships" xmlns:p="http://schemas.openxmlformats.org/presentationml/2006/main">
   <p:cSld>
     <p:spTree>
@@ -19495,7 +19847,7 @@
             <a:fld id="{00000000-1234-1234-1234-123412341234}" type="slidenum">
               <a:rPr lang="en" smtClean="0"/>
               <a:pPr/>
-              <a:t>32</a:t>
+              <a:t>33</a:t>
             </a:fld>
             <a:endParaRPr lang="en"/>
           </a:p>
@@ -19544,7 +19896,7 @@
 </p:sld>
 </file>
 
-<file path=ppt/slides/slide33.xml><?xml version="1.0" encoding="utf-8"?>
+<file path=ppt/slides/slide34.xml><?xml version="1.0" encoding="utf-8"?>
 <p:sld xmlns:a="http://schemas.openxmlformats.org/drawingml/2006/main" xmlns:r="http://schemas.openxmlformats.org/officeDocument/2006/relationships" xmlns:p="http://schemas.openxmlformats.org/presentationml/2006/main">
   <p:cSld>
     <p:spTree>
@@ -19678,7 +20030,7 @@
             <a:fld id="{00000000-1234-1234-1234-123412341234}" type="slidenum">
               <a:rPr lang="en" smtClean="0"/>
               <a:pPr/>
-              <a:t>33</a:t>
+              <a:t>34</a:t>
             </a:fld>
             <a:endParaRPr lang="en"/>
           </a:p>
@@ -19697,7 +20049,7 @@
 </p:sld>
 </file>
 
-<file path=ppt/slides/slide34.xml><?xml version="1.0" encoding="utf-8"?>
+<file path=ppt/slides/slide35.xml><?xml version="1.0" encoding="utf-8"?>
 <p:sld xmlns:a="http://schemas.openxmlformats.org/drawingml/2006/main" xmlns:r="http://schemas.openxmlformats.org/officeDocument/2006/relationships" xmlns:p="http://schemas.openxmlformats.org/presentationml/2006/main">
   <p:cSld>
     <p:spTree>
@@ -19810,7 +20162,7 @@
                 <a:ea typeface="Calibri" panose="020F0502020204030204" pitchFamily="34" charset="0"/>
                 <a:cs typeface="Times New Roman" panose="02020603050405020304" pitchFamily="18" charset="0"/>
               </a:rPr>
-              <a:t>Kannada has been done using LSTM and, in this project, it is attempted to do the same using Transfer learning, with the</a:t>
+              <a:t>Kannada has been done using LSTM and, in this project, it is attempted to do the same using Transformers, with the</a:t>
             </a:r>
             <a:r>
               <a:rPr lang="en-IN" sz="2670" kern="100" spc="5" dirty="0">
@@ -19901,6 +20253,19 @@
                 <a:cs typeface="Times New Roman" panose="02020603050405020304" pitchFamily="18" charset="0"/>
               </a:rPr>
               <a:t>checker.</a:t>
+            </a:r>
+          </a:p>
+          <a:p>
+            <a:pPr marL="152396" indent="0" algn="just">
+              <a:buNone/>
+            </a:pPr>
+            <a:r>
+              <a:rPr lang="en-IN" sz="2670" kern="0" dirty="0">
+                <a:effectLst/>
+                <a:latin typeface="Times New Roman" panose="02020603050405020304" pitchFamily="18" charset="0"/>
+                <a:ea typeface="Times New Roman" panose="02020603050405020304" pitchFamily="18" charset="0"/>
+              </a:rPr>
+              <a:t>As we move on with our work, we will be concentrating on improving the spell and grammar-checking tool to handle irregular verb usage, varied tenses, and intricate sentence structures.</a:t>
             </a:r>
             <a:endParaRPr lang="en-US" sz="2670" kern="100" dirty="0">
               <a:effectLst/>
@@ -19941,7 +20306,7 @@
             <a:fld id="{00000000-1234-1234-1234-123412341234}" type="slidenum">
               <a:rPr lang="en" smtClean="0"/>
               <a:pPr/>
-              <a:t>34</a:t>
+              <a:t>35</a:t>
             </a:fld>
             <a:endParaRPr lang="en"/>
           </a:p>
